--- a/doc/PPT/ARM/ARM 세미나 10주차.pptx
+++ b/doc/PPT/ARM/ARM 세미나 10주차.pptx
@@ -5,7 +5,7 @@
     <p:sldMasterId id="2147483910" r:id="rId1"/>
   </p:sldMasterIdLst>
   <p:notesMasterIdLst>
-    <p:notesMasterId r:id="rId26"/>
+    <p:notesMasterId r:id="rId27"/>
   </p:notesMasterIdLst>
   <p:sldIdLst>
     <p:sldId id="256" r:id="rId2"/>
@@ -32,6 +32,7 @@
     <p:sldId id="511" r:id="rId23"/>
     <p:sldId id="512" r:id="rId24"/>
     <p:sldId id="494" r:id="rId25"/>
+    <p:sldId id="513" r:id="rId26"/>
   </p:sldIdLst>
   <p:sldSz cx="12192000" cy="6858000"/>
   <p:notesSz cx="6858000" cy="9144000"/>
@@ -159,6 +160,7 @@
             <p14:sldId id="511"/>
             <p14:sldId id="512"/>
             <p14:sldId id="494"/>
+            <p14:sldId id="513"/>
           </p14:sldIdLst>
         </p14:section>
       </p14:sectionLst>
@@ -17945,6 +17947,311 @@
 </p:sld>
 </file>
 
+<file path=ppt/slides/slide25.xml><?xml version="1.0" encoding="utf-8"?>
+<p:sld xmlns:a="http://schemas.openxmlformats.org/drawingml/2006/main" xmlns:r="http://schemas.openxmlformats.org/officeDocument/2006/relationships" xmlns:p="http://schemas.openxmlformats.org/presentationml/2006/main">
+  <p:cSld>
+    <p:spTree>
+      <p:nvGrpSpPr>
+        <p:cNvPr id="1" name="">
+          <a:extLst>
+            <a:ext uri="{FF2B5EF4-FFF2-40B4-BE49-F238E27FC236}">
+              <a16:creationId xmlns:a16="http://schemas.microsoft.com/office/drawing/2014/main" id="{3F38047F-1D7A-3B0E-2D3E-E4817AD67B07}"/>
+            </a:ext>
+          </a:extLst>
+        </p:cNvPr>
+        <p:cNvGrpSpPr/>
+        <p:nvPr/>
+      </p:nvGrpSpPr>
+      <p:grpSpPr>
+        <a:xfrm>
+          <a:off x="0" y="0"/>
+          <a:ext cx="0" cy="0"/>
+          <a:chOff x="0" y="0"/>
+          <a:chExt cx="0" cy="0"/>
+        </a:xfrm>
+      </p:grpSpPr>
+      <p:sp>
+        <p:nvSpPr>
+          <p:cNvPr id="2" name="제목 1">
+            <a:extLst>
+              <a:ext uri="{FF2B5EF4-FFF2-40B4-BE49-F238E27FC236}">
+                <a16:creationId xmlns:a16="http://schemas.microsoft.com/office/drawing/2014/main" id="{A9BFFC88-8C1F-C17A-A324-302D4D302E1D}"/>
+              </a:ext>
+            </a:extLst>
+          </p:cNvPr>
+          <p:cNvSpPr>
+            <a:spLocks noGrp="1"/>
+          </p:cNvSpPr>
+          <p:nvPr>
+            <p:ph type="title"/>
+          </p:nvPr>
+        </p:nvSpPr>
+        <p:spPr>
+          <a:xfrm>
+            <a:off x="484552" y="365125"/>
+            <a:ext cx="10869248" cy="1687513"/>
+          </a:xfrm>
+        </p:spPr>
+        <p:txBody>
+          <a:bodyPr>
+            <a:normAutofit fontScale="90000"/>
+          </a:bodyPr>
+          <a:lstStyle/>
+          <a:p>
+            <a:r>
+              <a:rPr lang="en-US" altLang="ko-KR" dirty="0">
+                <a:latin typeface="+mn-lt"/>
+              </a:rPr>
+              <a:t>4. </a:t>
+            </a:r>
+            <a:r>
+              <a:rPr lang="ko-KR" altLang="en-US" dirty="0">
+                <a:latin typeface="+mn-lt"/>
+              </a:rPr>
+              <a:t>응용문제</a:t>
+            </a:r>
+            <a:br>
+              <a:rPr lang="en-US" altLang="ko-KR" dirty="0">
+                <a:latin typeface="+mn-lt"/>
+              </a:rPr>
+            </a:br>
+            <a:endParaRPr lang="ko-KR" altLang="en-US" dirty="0">
+              <a:latin typeface="+mn-lt"/>
+            </a:endParaRPr>
+          </a:p>
+        </p:txBody>
+      </p:sp>
+      <p:sp>
+        <p:nvSpPr>
+          <p:cNvPr id="5" name="TextBox 4">
+            <a:extLst>
+              <a:ext uri="{FF2B5EF4-FFF2-40B4-BE49-F238E27FC236}">
+                <a16:creationId xmlns:a16="http://schemas.microsoft.com/office/drawing/2014/main" id="{C12B1424-7838-BFB7-E72D-315B7CEDC1D2}"/>
+              </a:ext>
+            </a:extLst>
+          </p:cNvPr>
+          <p:cNvSpPr txBox="1"/>
+          <p:nvPr/>
+        </p:nvSpPr>
+        <p:spPr>
+          <a:xfrm>
+            <a:off x="10000850" y="4290646"/>
+            <a:ext cx="184731" cy="369332"/>
+          </a:xfrm>
+          <a:prstGeom prst="rect">
+            <a:avLst/>
+          </a:prstGeom>
+          <a:noFill/>
+        </p:spPr>
+        <p:txBody>
+          <a:bodyPr wrap="none" rtlCol="0">
+            <a:spAutoFit/>
+          </a:bodyPr>
+          <a:lstStyle/>
+          <a:p>
+            <a:endParaRPr kumimoji="1" lang="ko-KR" altLang="en-US" dirty="0"/>
+          </a:p>
+        </p:txBody>
+      </p:sp>
+      <p:sp>
+        <p:nvSpPr>
+          <p:cNvPr id="3" name="TextBox 2">
+            <a:extLst>
+              <a:ext uri="{FF2B5EF4-FFF2-40B4-BE49-F238E27FC236}">
+                <a16:creationId xmlns:a16="http://schemas.microsoft.com/office/drawing/2014/main" id="{B6A6B8A7-EA4F-E491-1704-DABDC77EE770}"/>
+              </a:ext>
+            </a:extLst>
+          </p:cNvPr>
+          <p:cNvSpPr txBox="1"/>
+          <p:nvPr/>
+        </p:nvSpPr>
+        <p:spPr>
+          <a:xfrm>
+            <a:off x="484552" y="2720986"/>
+            <a:ext cx="8899488" cy="1754326"/>
+          </a:xfrm>
+          <a:prstGeom prst="rect">
+            <a:avLst/>
+          </a:prstGeom>
+          <a:noFill/>
+        </p:spPr>
+        <p:txBody>
+          <a:bodyPr wrap="none" rtlCol="0">
+            <a:spAutoFit/>
+          </a:bodyPr>
+          <a:lstStyle/>
+          <a:p>
+            <a:pPr marL="285750" indent="-285750">
+              <a:buFont typeface="Arial" panose="020B0604020202020204" pitchFamily="34" charset="0"/>
+              <a:buChar char="•"/>
+            </a:pPr>
+            <a:r>
+              <a:rPr kumimoji="1" lang="ko-KR" altLang="en-US" dirty="0"/>
+              <a:t>문제</a:t>
+            </a:r>
+            <a:r>
+              <a:rPr kumimoji="1" lang="en-US" altLang="ko-KR" dirty="0"/>
+              <a:t>:</a:t>
+            </a:r>
+            <a:r>
+              <a:rPr kumimoji="1" lang="ko-KR" altLang="en-US" dirty="0"/>
+              <a:t> </a:t>
+            </a:r>
+            <a:r>
+              <a:rPr kumimoji="1" lang="en-US" altLang="ko-KR" dirty="0"/>
+              <a:t>9</a:t>
+            </a:r>
+            <a:r>
+              <a:rPr kumimoji="1" lang="ko-KR" altLang="en-US" dirty="0"/>
+              <a:t>주차에서 진행한 </a:t>
+            </a:r>
+            <a:r>
+              <a:rPr kumimoji="1" lang="en-US" altLang="ko-KR" dirty="0"/>
+              <a:t>MP3</a:t>
+            </a:r>
+            <a:r>
+              <a:rPr kumimoji="1" lang="ko-KR" altLang="en-US" dirty="0"/>
+              <a:t> 만들기를 </a:t>
+            </a:r>
+            <a:r>
+              <a:rPr kumimoji="1" lang="en-US" altLang="ko-KR" dirty="0"/>
+              <a:t>CAN</a:t>
+            </a:r>
+            <a:r>
+              <a:rPr kumimoji="1" lang="ko-KR" altLang="en-US" dirty="0"/>
+              <a:t>을 통해 제어하기</a:t>
+            </a:r>
+            <a:br>
+              <a:rPr kumimoji="1" lang="en-US" altLang="ko-KR" dirty="0"/>
+            </a:br>
+            <a:br>
+              <a:rPr kumimoji="1" lang="en-US" altLang="ko-KR" dirty="0"/>
+            </a:br>
+            <a:r>
+              <a:rPr kumimoji="1" lang="en-US" altLang="ko-KR" dirty="0"/>
+              <a:t>A(MP3</a:t>
+            </a:r>
+            <a:r>
+              <a:rPr kumimoji="1" lang="ko-KR" altLang="en-US" dirty="0"/>
+              <a:t> 보드</a:t>
+            </a:r>
+            <a:r>
+              <a:rPr kumimoji="1" lang="en-US" altLang="ko-KR" dirty="0"/>
+              <a:t>),</a:t>
+            </a:r>
+            <a:r>
+              <a:rPr kumimoji="1" lang="ko-KR" altLang="en-US" dirty="0"/>
+              <a:t> </a:t>
+            </a:r>
+            <a:r>
+              <a:rPr kumimoji="1" lang="en-US" altLang="ko-KR" dirty="0"/>
+              <a:t>B(</a:t>
+            </a:r>
+            <a:r>
+              <a:rPr kumimoji="1" lang="ko-KR" altLang="en-US" dirty="0"/>
+              <a:t>제어보드</a:t>
+            </a:r>
+            <a:r>
+              <a:rPr kumimoji="1" lang="en-US" altLang="ko-KR" dirty="0"/>
+              <a:t>)</a:t>
+            </a:r>
+            <a:br>
+              <a:rPr kumimoji="1" lang="en-US" altLang="ko-KR" dirty="0"/>
+            </a:br>
+            <a:br>
+              <a:rPr kumimoji="1" lang="en-US" altLang="ko-KR" dirty="0"/>
+            </a:br>
+            <a:r>
+              <a:rPr kumimoji="1" lang="en-US" altLang="ko-KR" dirty="0"/>
+              <a:t>B</a:t>
+            </a:r>
+            <a:r>
+              <a:rPr kumimoji="1" lang="ko-KR" altLang="en-US" dirty="0"/>
+              <a:t>보드에 있는 버튼을 눌러 </a:t>
+            </a:r>
+            <a:r>
+              <a:rPr kumimoji="1" lang="en-US" altLang="ko-KR" dirty="0"/>
+              <a:t>A</a:t>
+            </a:r>
+            <a:r>
+              <a:rPr kumimoji="1" lang="ko-KR" altLang="en-US" dirty="0"/>
+              <a:t>보드의 일시정지</a:t>
+            </a:r>
+            <a:r>
+              <a:rPr kumimoji="1" lang="en-US" altLang="ko-KR" dirty="0"/>
+              <a:t>,</a:t>
+            </a:r>
+            <a:r>
+              <a:rPr kumimoji="1" lang="ko-KR" altLang="en-US" dirty="0"/>
+              <a:t> 재생</a:t>
+            </a:r>
+            <a:r>
+              <a:rPr kumimoji="1" lang="en-US" altLang="ko-KR" dirty="0"/>
+              <a:t>,</a:t>
+            </a:r>
+            <a:r>
+              <a:rPr kumimoji="1" lang="ko-KR" altLang="en-US" dirty="0"/>
+              <a:t> </a:t>
+            </a:r>
+            <a:r>
+              <a:rPr kumimoji="1" lang="ko-KR" altLang="en-US" dirty="0" err="1"/>
+              <a:t>다음곡</a:t>
+            </a:r>
+            <a:r>
+              <a:rPr kumimoji="1" lang="en-US" altLang="ko-KR" dirty="0"/>
+              <a:t>,</a:t>
+            </a:r>
+            <a:r>
+              <a:rPr kumimoji="1" lang="ko-KR" altLang="en-US" dirty="0"/>
+              <a:t> </a:t>
+            </a:r>
+            <a:r>
+              <a:rPr kumimoji="1" lang="ko-KR" altLang="en-US" dirty="0" err="1"/>
+              <a:t>이전곡</a:t>
+            </a:r>
+            <a:r>
+              <a:rPr kumimoji="1" lang="ko-KR" altLang="en-US" dirty="0"/>
+              <a:t> 기능을 제어하기</a:t>
+            </a:r>
+            <a:br>
+              <a:rPr kumimoji="1" lang="en-US" altLang="ko-KR" dirty="0"/>
+            </a:br>
+            <a:r>
+              <a:rPr kumimoji="1" lang="ko-KR" altLang="en-US" dirty="0"/>
+              <a:t>이때 기존 </a:t>
+            </a:r>
+            <a:r>
+              <a:rPr kumimoji="1" lang="en-US" altLang="ko-KR" dirty="0"/>
+              <a:t>A</a:t>
+            </a:r>
+            <a:r>
+              <a:rPr kumimoji="1" lang="ko-KR" altLang="en-US" dirty="0"/>
+              <a:t>보드에 출력되어야 하는 곡정보를 </a:t>
+            </a:r>
+            <a:r>
+              <a:rPr kumimoji="1" lang="en-US" altLang="ko-KR" dirty="0"/>
+              <a:t>B</a:t>
+            </a:r>
+            <a:r>
+              <a:rPr kumimoji="1" lang="ko-KR" altLang="en-US" dirty="0"/>
+              <a:t>보드 디스플레이에서 보여주기</a:t>
+            </a:r>
+          </a:p>
+        </p:txBody>
+      </p:sp>
+    </p:spTree>
+    <p:extLst>
+      <p:ext uri="{BB962C8B-B14F-4D97-AF65-F5344CB8AC3E}">
+        <p14:creationId xmlns:p14="http://schemas.microsoft.com/office/powerpoint/2010/main" val="3807957859"/>
+      </p:ext>
+    </p:extLst>
+  </p:cSld>
+  <p:clrMapOvr>
+    <a:masterClrMapping/>
+  </p:clrMapOvr>
+</p:sld>
+</file>
+
 <file path=ppt/slides/slide3.xml><?xml version="1.0" encoding="utf-8"?>
 <p:sld xmlns:a="http://schemas.openxmlformats.org/drawingml/2006/main" xmlns:r="http://schemas.openxmlformats.org/officeDocument/2006/relationships" xmlns:p="http://schemas.openxmlformats.org/presentationml/2006/main">
   <p:cSld>
